--- a/instructions/instructions2.pptx
+++ b/instructions/instructions2.pptx
@@ -241,7 +241,7 @@
           <a:p>
             <a:fld id="{56C1262A-8E22-4BE6-A8FE-00869FC64ED9}" type="datetimeFigureOut">
               <a:rPr lang="de-DE" smtClean="0"/>
-              <a:t>21.02.2024</a:t>
+              <a:t>12.03.2026</a:t>
             </a:fld>
             <a:endParaRPr lang="de-DE"/>
           </a:p>
@@ -409,7 +409,7 @@
           <a:p>
             <a:fld id="{56C1262A-8E22-4BE6-A8FE-00869FC64ED9}" type="datetimeFigureOut">
               <a:rPr lang="de-DE" smtClean="0"/>
-              <a:t>21.02.2024</a:t>
+              <a:t>12.03.2026</a:t>
             </a:fld>
             <a:endParaRPr lang="de-DE"/>
           </a:p>
@@ -587,7 +587,7 @@
           <a:p>
             <a:fld id="{56C1262A-8E22-4BE6-A8FE-00869FC64ED9}" type="datetimeFigureOut">
               <a:rPr lang="de-DE" smtClean="0"/>
-              <a:t>21.02.2024</a:t>
+              <a:t>12.03.2026</a:t>
             </a:fld>
             <a:endParaRPr lang="de-DE"/>
           </a:p>
@@ -763,7 +763,7 @@
           <a:p>
             <a:fld id="{56C1262A-8E22-4BE6-A8FE-00869FC64ED9}" type="datetimeFigureOut">
               <a:rPr lang="de-DE" smtClean="0"/>
-              <a:t>21.02.2024</a:t>
+              <a:t>12.03.2026</a:t>
             </a:fld>
             <a:endParaRPr lang="de-DE"/>
           </a:p>
@@ -1008,7 +1008,7 @@
           <a:p>
             <a:fld id="{56C1262A-8E22-4BE6-A8FE-00869FC64ED9}" type="datetimeFigureOut">
               <a:rPr lang="de-DE" smtClean="0"/>
-              <a:t>21.02.2024</a:t>
+              <a:t>12.03.2026</a:t>
             </a:fld>
             <a:endParaRPr lang="de-DE"/>
           </a:p>
@@ -1237,7 +1237,7 @@
           <a:p>
             <a:fld id="{56C1262A-8E22-4BE6-A8FE-00869FC64ED9}" type="datetimeFigureOut">
               <a:rPr lang="de-DE" smtClean="0"/>
-              <a:t>21.02.2024</a:t>
+              <a:t>12.03.2026</a:t>
             </a:fld>
             <a:endParaRPr lang="de-DE"/>
           </a:p>
@@ -1601,7 +1601,7 @@
           <a:p>
             <a:fld id="{56C1262A-8E22-4BE6-A8FE-00869FC64ED9}" type="datetimeFigureOut">
               <a:rPr lang="de-DE" smtClean="0"/>
-              <a:t>21.02.2024</a:t>
+              <a:t>12.03.2026</a:t>
             </a:fld>
             <a:endParaRPr lang="de-DE"/>
           </a:p>
@@ -1718,7 +1718,7 @@
           <a:p>
             <a:fld id="{56C1262A-8E22-4BE6-A8FE-00869FC64ED9}" type="datetimeFigureOut">
               <a:rPr lang="de-DE" smtClean="0"/>
-              <a:t>21.02.2024</a:t>
+              <a:t>12.03.2026</a:t>
             </a:fld>
             <a:endParaRPr lang="de-DE"/>
           </a:p>
@@ -1813,7 +1813,7 @@
           <a:p>
             <a:fld id="{56C1262A-8E22-4BE6-A8FE-00869FC64ED9}" type="datetimeFigureOut">
               <a:rPr lang="de-DE" smtClean="0"/>
-              <a:t>21.02.2024</a:t>
+              <a:t>12.03.2026</a:t>
             </a:fld>
             <a:endParaRPr lang="de-DE"/>
           </a:p>
@@ -2088,7 +2088,7 @@
           <a:p>
             <a:fld id="{56C1262A-8E22-4BE6-A8FE-00869FC64ED9}" type="datetimeFigureOut">
               <a:rPr lang="de-DE" smtClean="0"/>
-              <a:t>21.02.2024</a:t>
+              <a:t>12.03.2026</a:t>
             </a:fld>
             <a:endParaRPr lang="de-DE"/>
           </a:p>
@@ -2340,7 +2340,7 @@
           <a:p>
             <a:fld id="{56C1262A-8E22-4BE6-A8FE-00869FC64ED9}" type="datetimeFigureOut">
               <a:rPr lang="de-DE" smtClean="0"/>
-              <a:t>21.02.2024</a:t>
+              <a:t>12.03.2026</a:t>
             </a:fld>
             <a:endParaRPr lang="de-DE"/>
           </a:p>
@@ -2551,7 +2551,7 @@
           <a:p>
             <a:fld id="{56C1262A-8E22-4BE6-A8FE-00869FC64ED9}" type="datetimeFigureOut">
               <a:rPr lang="de-DE" smtClean="0"/>
-              <a:t>21.02.2024</a:t>
+              <a:t>12.03.2026</a:t>
             </a:fld>
             <a:endParaRPr lang="de-DE"/>
           </a:p>
@@ -3017,28 +3017,8 @@
               <a:buNone/>
             </a:pPr>
             <a:r>
-              <a:rPr lang="de-DE" sz="2400" dirty="0"/>
-              <a:t>Next, </a:t>
-            </a:r>
-            <a:r>
               <a:rPr lang="de-DE" sz="2400" dirty="0" err="1"/>
-              <a:t>you</a:t>
-            </a:r>
-            <a:r>
-              <a:rPr lang="de-DE" sz="2400" dirty="0"/>
-              <a:t> will </a:t>
-            </a:r>
-            <a:r>
-              <a:rPr lang="de-DE" sz="2400" dirty="0" err="1"/>
-              <a:t>work</a:t>
-            </a:r>
-            <a:r>
-              <a:rPr lang="de-DE" sz="2400" dirty="0"/>
-              <a:t> on a </a:t>
-            </a:r>
-            <a:r>
-              <a:rPr lang="de-DE" sz="2400" dirty="0" err="1"/>
-              <a:t>longer</a:t>
+              <a:t>You</a:t>
             </a:r>
             <a:r>
               <a:rPr lang="de-DE" sz="2400" dirty="0"/>
@@ -3046,15 +3026,7 @@
             </a:r>
             <a:r>
               <a:rPr lang="de-DE" sz="2400" dirty="0" err="1"/>
-              <a:t>training</a:t>
-            </a:r>
-            <a:r>
-              <a:rPr lang="de-DE" sz="2400" dirty="0"/>
-              <a:t> block </a:t>
-            </a:r>
-            <a:r>
-              <a:rPr lang="de-DE" sz="2400" dirty="0" err="1"/>
-              <a:t>during</a:t>
+              <a:t>can</a:t>
             </a:r>
             <a:r>
               <a:rPr lang="de-DE" sz="2400" dirty="0"/>
@@ -3062,7 +3034,7 @@
             </a:r>
             <a:r>
               <a:rPr lang="de-DE" sz="2400" dirty="0" err="1"/>
-              <a:t>which</a:t>
+              <a:t>start</a:t>
             </a:r>
             <a:r>
               <a:rPr lang="de-DE" sz="2400" dirty="0"/>
@@ -3070,15 +3042,7 @@
             </a:r>
             <a:r>
               <a:rPr lang="de-DE" sz="2400" dirty="0" err="1"/>
-              <a:t>you</a:t>
-            </a:r>
-            <a:r>
-              <a:rPr lang="de-DE" sz="2400" dirty="0"/>
-              <a:t> will </a:t>
-            </a:r>
-            <a:r>
-              <a:rPr lang="de-DE" sz="2400" dirty="0" err="1"/>
-              <a:t>receive</a:t>
+              <a:t>with</a:t>
             </a:r>
             <a:r>
               <a:rPr lang="de-DE" sz="2400" dirty="0"/>
@@ -3086,7 +3050,7 @@
             </a:r>
             <a:r>
               <a:rPr lang="de-DE" sz="2400" dirty="0" err="1"/>
-              <a:t>feedback</a:t>
+              <a:t>the</a:t>
             </a:r>
             <a:r>
               <a:rPr lang="de-DE" sz="2400" dirty="0"/>
@@ -3094,59 +3058,11 @@
             </a:r>
             <a:r>
               <a:rPr lang="de-DE" sz="2400" dirty="0" err="1"/>
-              <a:t>only</a:t>
+              <a:t>experiment</a:t>
             </a:r>
             <a:r>
               <a:rPr lang="de-DE" sz="2400" dirty="0"/>
-              <a:t> </a:t>
-            </a:r>
-            <a:r>
-              <a:rPr lang="de-DE" sz="2400" dirty="0" err="1"/>
-              <a:t>if</a:t>
-            </a:r>
-            <a:r>
-              <a:rPr lang="de-DE" sz="2400" dirty="0"/>
-              <a:t> </a:t>
-            </a:r>
-            <a:r>
-              <a:rPr lang="de-DE" sz="2400" dirty="0" err="1"/>
-              <a:t>you</a:t>
-            </a:r>
-            <a:r>
-              <a:rPr lang="de-DE" sz="2400" dirty="0"/>
-              <a:t> </a:t>
-            </a:r>
-            <a:r>
-              <a:rPr lang="de-DE" sz="2400" dirty="0" err="1"/>
-              <a:t>react</a:t>
-            </a:r>
-            <a:r>
-              <a:rPr lang="de-DE" sz="2400" dirty="0"/>
-              <a:t> </a:t>
-            </a:r>
-            <a:r>
-              <a:rPr lang="de-DE" sz="2400" dirty="0" err="1"/>
-              <a:t>incorrectly</a:t>
-            </a:r>
-            <a:r>
-              <a:rPr lang="de-DE" sz="2400" dirty="0"/>
-              <a:t> </a:t>
-            </a:r>
-            <a:r>
-              <a:rPr lang="de-DE" sz="2400" dirty="0" err="1"/>
-              <a:t>or</a:t>
-            </a:r>
-            <a:r>
-              <a:rPr lang="de-DE" sz="2400" dirty="0"/>
-              <a:t> </a:t>
-            </a:r>
-            <a:r>
-              <a:rPr lang="de-DE" sz="2400" dirty="0" err="1"/>
-              <a:t>too</a:t>
-            </a:r>
-            <a:r>
-              <a:rPr lang="de-DE" sz="2400" dirty="0"/>
-              <a:t> slow.</a:t>
+              <a:t>!</a:t>
             </a:r>
           </a:p>
         </p:txBody>
@@ -3166,7 +3082,7 @@
           <p:nvPr>
             <p:extLst>
               <p:ext uri="{D42A27DB-BD31-4B8C-83A1-F6EECF244321}">
-                <p14:modId xmlns:p14="http://schemas.microsoft.com/office/powerpoint/2010/main" val="1015765385"/>
+                <p14:modId xmlns:p14="http://schemas.microsoft.com/office/powerpoint/2010/main" val="2834973831"/>
               </p:ext>
             </p:extLst>
           </p:nvPr>
@@ -3242,13 +3158,12 @@
                       </a:r>
                       <a:r>
                         <a:rPr lang="de-DE" dirty="0" err="1"/>
-                        <a:t>training</a:t>
+                        <a:t>experiment</a:t>
                       </a:r>
                       <a:r>
-                        <a:rPr lang="de-DE"/>
+                        <a:rPr lang="de-DE" dirty="0"/>
                         <a:t>: C</a:t>
                       </a:r>
-                      <a:endParaRPr lang="de-DE" dirty="0"/>
                     </a:p>
                   </a:txBody>
                   <a:tcPr>
